--- a/Kiểm thử Phần mềm.pptx
+++ b/Kiểm thử Phần mềm.pptx
@@ -16,8 +16,7 @@
     <p:sldId id="269" r:id="rId10"/>
     <p:sldId id="270" r:id="rId11"/>
     <p:sldId id="262" r:id="rId12"/>
-    <p:sldId id="271" r:id="rId13"/>
-    <p:sldId id="266" r:id="rId14"/>
+    <p:sldId id="266" r:id="rId13"/>
   </p:sldIdLst>
   <p:sldSz cx="9144000" cy="5143500" type="screen16x9"/>
   <p:notesSz cx="6858000" cy="9144000"/>
@@ -9948,90 +9947,6 @@
 </p:sld>
 </file>
 
-<file path=ppt/slides/slide10.xml><?xml version="1.0" encoding="utf-8"?>
-<p:sld xmlns:a="http://schemas.openxmlformats.org/drawingml/2006/main" xmlns:r="http://schemas.openxmlformats.org/officeDocument/2006/relationships" xmlns:p="http://schemas.openxmlformats.org/presentationml/2006/main">
-  <p:cSld>
-    <p:spTree>
-      <p:nvGrpSpPr>
-        <p:cNvPr id="1" name=""/>
-        <p:cNvGrpSpPr/>
-        <p:nvPr/>
-      </p:nvGrpSpPr>
-      <p:grpSpPr>
-        <a:xfrm>
-          <a:off x="0" y="0"/>
-          <a:ext cx="0" cy="0"/>
-          <a:chOff x="0" y="0"/>
-          <a:chExt cx="0" cy="0"/>
-        </a:xfrm>
-      </p:grpSpPr>
-      <p:sp>
-        <p:nvSpPr>
-          <p:cNvPr id="186" name="PlaceHolder 1"/>
-          <p:cNvSpPr>
-            <a:spLocks noGrp="1"/>
-          </p:cNvSpPr>
-          <p:nvPr>
-            <p:ph type="title"/>
-          </p:nvPr>
-        </p:nvSpPr>
-        <p:spPr>
-          <a:xfrm>
-            <a:off x="2500379" y="1596596"/>
-            <a:ext cx="4993051" cy="1199880"/>
-          </a:xfrm>
-          <a:prstGeom prst="rect">
-            <a:avLst/>
-          </a:prstGeom>
-          <a:noFill/>
-          <a:ln w="0">
-            <a:noFill/>
-          </a:ln>
-        </p:spPr>
-        <p:txBody>
-          <a:bodyPr lIns="91440" tIns="91440" rIns="91440" bIns="91440" anchor="b">
-            <a:noAutofit/>
-          </a:bodyPr>
-          <a:lstStyle/>
-          <a:p>
-            <a:pPr indent="0" algn="ctr">
-              <a:lnSpc>
-                <a:spcPct val="100000"/>
-              </a:lnSpc>
-              <a:buNone/>
-              <a:tabLst>
-                <a:tab pos="0" algn="l"/>
-              </a:tabLst>
-            </a:pPr>
-            <a:r>
-              <a:rPr lang="en-US" b="1" u="none" strike="noStrike">
-                <a:solidFill>
-                  <a:schemeClr val="dk1"/>
-                </a:solidFill>
-                <a:effectLst/>
-                <a:uFillTx/>
-                <a:ea typeface="Golos Text"/>
-              </a:rPr>
-              <a:t>Cảm ơn thầy đã lắng nghe!</a:t>
-            </a:r>
-            <a:endParaRPr lang="fr-FR" b="1" u="none" strike="noStrike">
-              <a:solidFill>
-                <a:schemeClr val="dk1"/>
-              </a:solidFill>
-              <a:effectLst/>
-              <a:uFillTx/>
-            </a:endParaRPr>
-          </a:p>
-        </p:txBody>
-      </p:sp>
-    </p:spTree>
-  </p:cSld>
-  <p:clrMapOvr>
-    <a:masterClrMapping/>
-  </p:clrMapOvr>
-</p:sld>
-</file>
-
 <file path=ppt/slides/slide2.xml><?xml version="1.0" encoding="utf-8"?>
 <p:sld xmlns:a="http://schemas.openxmlformats.org/drawingml/2006/main" xmlns:r="http://schemas.openxmlformats.org/officeDocument/2006/relationships" xmlns:p="http://schemas.openxmlformats.org/presentationml/2006/main">
   <p:cSld>
@@ -10481,8 +10396,8 @@
         </p:nvSpPr>
         <p:spPr>
           <a:xfrm>
-            <a:off x="4645322" y="236056"/>
-            <a:ext cx="4289449" cy="952200"/>
+            <a:off x="697424" y="236056"/>
+            <a:ext cx="8237347" cy="952200"/>
           </a:xfrm>
           <a:prstGeom prst="rect">
             <a:avLst/>
@@ -10540,8 +10455,8 @@
         </p:nvSpPr>
         <p:spPr>
           <a:xfrm>
-            <a:off x="4980507" y="1881873"/>
-            <a:ext cx="3619080" cy="2761920"/>
+            <a:off x="593796" y="1188256"/>
+            <a:ext cx="7956407" cy="2761920"/>
           </a:xfrm>
           <a:prstGeom prst="rect">
             <a:avLst/>
@@ -10565,7 +10480,7 @@
         </p:style>
         <p:txBody>
           <a:bodyPr anchor="t">
-            <a:normAutofit/>
+            <a:normAutofit fontScale="92500" lnSpcReduction="20000"/>
           </a:bodyPr>
           <a:lstStyle/>
           <a:p>
@@ -10591,7 +10506,127 @@
                 <a:ea typeface="+mj-ea"/>
                 <a:cs typeface="+mj-cs"/>
               </a:rPr>
-              <a:t>Lập kế hoạch kiểm thử </a:t>
+              <a:t>Lập kế hoạch kiểm thử</a:t>
+            </a:r>
+            <a:r>
+              <a:rPr lang="en-US" sz="1600">
+                <a:latin typeface="+mj-lt"/>
+                <a:ea typeface="+mj-ea"/>
+                <a:cs typeface="+mj-cs"/>
+              </a:rPr>
+              <a:t>:</a:t>
+            </a:r>
+          </a:p>
+          <a:p>
+            <a:pPr marL="742950" lvl="1" indent="-285750" fontAlgn="base">
+              <a:lnSpc>
+                <a:spcPct val="150000"/>
+              </a:lnSpc>
+              <a:spcBef>
+                <a:spcPct val="0"/>
+              </a:spcBef>
+              <a:spcAft>
+                <a:spcPct val="0"/>
+              </a:spcAft>
+              <a:buFont typeface="Symbol" panose="05050102010706020507" pitchFamily="18" charset="2"/>
+              <a:buChar char="+"/>
+              <a:tabLst>
+                <a:tab pos="0" algn="l"/>
+              </a:tabLst>
+            </a:pPr>
+            <a:r>
+              <a:rPr lang="vi-VN" sz="1600">
+                <a:latin typeface="+mj-lt"/>
+                <a:ea typeface="+mj-ea"/>
+                <a:cs typeface="+mj-cs"/>
+              </a:rPr>
+              <a:t> </a:t>
+            </a:r>
+            <a:r>
+              <a:rPr lang="en-US" sz="1600">
+                <a:latin typeface="+mj-lt"/>
+                <a:ea typeface="+mj-ea"/>
+                <a:cs typeface="+mj-cs"/>
+              </a:rPr>
+              <a:t>Phạm vi: Đăng ký, đăng nhập, tìm kiếm</a:t>
+            </a:r>
+          </a:p>
+          <a:p>
+            <a:pPr marL="742950" lvl="1" indent="-285750" fontAlgn="base">
+              <a:lnSpc>
+                <a:spcPct val="150000"/>
+              </a:lnSpc>
+              <a:spcBef>
+                <a:spcPct val="0"/>
+              </a:spcBef>
+              <a:spcAft>
+                <a:spcPct val="0"/>
+              </a:spcAft>
+              <a:buFont typeface="Symbol" panose="05050102010706020507" pitchFamily="18" charset="2"/>
+              <a:buChar char="+"/>
+              <a:tabLst>
+                <a:tab pos="0" algn="l"/>
+              </a:tabLst>
+            </a:pPr>
+            <a:r>
+              <a:rPr lang="vi-VN" sz="1600">
+                <a:latin typeface="+mj-lt"/>
+                <a:ea typeface="+mj-ea"/>
+                <a:cs typeface="+mj-cs"/>
+              </a:rPr>
+              <a:t>Công cụ: Chrome, Excel, Word</a:t>
+            </a:r>
+          </a:p>
+          <a:p>
+            <a:pPr marL="742950" lvl="1" indent="-285750" fontAlgn="base">
+              <a:lnSpc>
+                <a:spcPct val="150000"/>
+              </a:lnSpc>
+              <a:spcBef>
+                <a:spcPct val="0"/>
+              </a:spcBef>
+              <a:spcAft>
+                <a:spcPct val="0"/>
+              </a:spcAft>
+              <a:buFont typeface="Symbol" panose="05050102010706020507" pitchFamily="18" charset="2"/>
+              <a:buChar char="+"/>
+              <a:tabLst>
+                <a:tab pos="0" algn="l"/>
+              </a:tabLst>
+            </a:pPr>
+            <a:r>
+              <a:rPr lang="vi-VN" sz="1600">
+                <a:latin typeface="+mj-lt"/>
+                <a:ea typeface="+mj-ea"/>
+                <a:cs typeface="+mj-cs"/>
+              </a:rPr>
+              <a:t>Tiêu chí vào: website hoạt động, testcase đã chuẩn bị</a:t>
+            </a:r>
+          </a:p>
+          <a:p>
+            <a:pPr marL="742950" lvl="1" indent="-285750" fontAlgn="base">
+              <a:lnSpc>
+                <a:spcPct val="150000"/>
+              </a:lnSpc>
+              <a:spcBef>
+                <a:spcPct val="0"/>
+              </a:spcBef>
+              <a:spcAft>
+                <a:spcPct val="0"/>
+              </a:spcAft>
+              <a:buFont typeface="Symbol" panose="05050102010706020507" pitchFamily="18" charset="2"/>
+              <a:buChar char="+"/>
+              <a:tabLst>
+                <a:tab pos="0" algn="l"/>
+              </a:tabLst>
+            </a:pPr>
+            <a:r>
+              <a:rPr lang="vi-VN" sz="1600">
+                <a:latin typeface="+mj-lt"/>
+                <a:ea typeface="+mj-ea"/>
+                <a:cs typeface="+mj-cs"/>
+              </a:rPr>
+              <a:t>Tiêu chí ra: testcase đã thực hiện xong, không còn lỗi quan trọng</a:t>
             </a:r>
           </a:p>
           <a:p>
@@ -10674,30 +10709,6 @@
           </a:p>
         </p:txBody>
       </p:sp>
-      <p:pic>
-        <p:nvPicPr>
-          <p:cNvPr id="181" name="image69b93800a927d" descr="image69b93800a9281"/>
-          <p:cNvPicPr/>
-          <p:nvPr/>
-        </p:nvPicPr>
-        <p:blipFill>
-          <a:blip r:embed="rId2"/>
-          <a:stretch/>
-        </p:blipFill>
-        <p:spPr>
-          <a:xfrm>
-            <a:off x="0" y="0"/>
-            <a:ext cx="4571640" cy="5143320"/>
-          </a:xfrm>
-          <a:prstGeom prst="rect">
-            <a:avLst/>
-          </a:prstGeom>
-          <a:noFill/>
-          <a:ln w="0">
-            <a:noFill/>
-          </a:ln>
-        </p:spPr>
-      </p:pic>
     </p:spTree>
   </p:cSld>
   <p:clrMapOvr>
@@ -11622,7 +11633,7 @@
         </p:nvSpPr>
         <p:spPr>
           <a:xfrm>
-            <a:off x="549717" y="158565"/>
+            <a:off x="642381" y="0"/>
             <a:ext cx="3619080" cy="1428480"/>
           </a:xfrm>
           <a:prstGeom prst="rect">
@@ -11687,8 +11698,8 @@
         </p:nvGrpSpPr>
         <p:grpSpPr>
           <a:xfrm>
-            <a:off x="1045076" y="939884"/>
-            <a:ext cx="7053848" cy="3916171"/>
+            <a:off x="1363321" y="1999580"/>
+            <a:ext cx="6417358" cy="3143920"/>
             <a:chOff x="1028517" y="872805"/>
             <a:chExt cx="6902805" cy="4051983"/>
           </a:xfrm>
@@ -11768,108 +11779,12 @@
           </p:spPr>
         </p:pic>
       </p:grpSp>
-    </p:spTree>
-  </p:cSld>
-  <p:clrMapOvr>
-    <a:masterClrMapping/>
-  </p:clrMapOvr>
-</p:sld>
-</file>
-
-<file path=ppt/slides/slide9.xml><?xml version="1.0" encoding="utf-8"?>
-<p:sld xmlns:a="http://schemas.openxmlformats.org/drawingml/2006/main" xmlns:r="http://schemas.openxmlformats.org/officeDocument/2006/relationships" xmlns:p="http://schemas.openxmlformats.org/presentationml/2006/main">
-  <p:cSld>
-    <p:spTree>
-      <p:nvGrpSpPr>
-        <p:cNvPr id="1" name="">
-          <a:extLst>
-            <a:ext uri="{FF2B5EF4-FFF2-40B4-BE49-F238E27FC236}">
-              <a16:creationId xmlns:a16="http://schemas.microsoft.com/office/drawing/2014/main" id="{D4AA3AF1-243B-21D6-D003-A0D841073DF8}"/>
-            </a:ext>
-          </a:extLst>
-        </p:cNvPr>
-        <p:cNvGrpSpPr/>
-        <p:nvPr/>
-      </p:nvGrpSpPr>
-      <p:grpSpPr>
-        <a:xfrm>
-          <a:off x="0" y="0"/>
-          <a:ext cx="0" cy="0"/>
-          <a:chOff x="0" y="0"/>
-          <a:chExt cx="0" cy="0"/>
-        </a:xfrm>
-      </p:grpSpPr>
       <p:sp>
         <p:nvSpPr>
-          <p:cNvPr id="177" name="Rectangle 176">
+          <p:cNvPr id="9" name="TextBox 8">
             <a:extLst>
               <a:ext uri="{FF2B5EF4-FFF2-40B4-BE49-F238E27FC236}">
-                <a16:creationId xmlns:a16="http://schemas.microsoft.com/office/drawing/2014/main" id="{68D5C6D9-1383-6BA9-6B70-DCA972B37951}"/>
-              </a:ext>
-            </a:extLst>
-          </p:cNvPr>
-          <p:cNvSpPr/>
-          <p:nvPr/>
-        </p:nvSpPr>
-        <p:spPr>
-          <a:xfrm>
-            <a:off x="549717" y="158565"/>
-            <a:ext cx="3619080" cy="1428480"/>
-          </a:xfrm>
-          <a:prstGeom prst="rect">
-            <a:avLst/>
-          </a:prstGeom>
-          <a:noFill/>
-          <a:ln w="0">
-            <a:noFill/>
-          </a:ln>
-        </p:spPr>
-        <p:style>
-          <a:lnRef idx="0">
-            <a:scrgbClr r="0" g="0" b="0"/>
-          </a:lnRef>
-          <a:fillRef idx="0">
-            <a:scrgbClr r="0" g="0" b="0"/>
-          </a:fillRef>
-          <a:effectRef idx="0">
-            <a:scrgbClr r="0" g="0" b="0"/>
-          </a:effectRef>
-          <a:fontRef idx="minor"/>
-        </p:style>
-        <p:txBody>
-          <a:bodyPr anchor="t">
-            <a:normAutofit/>
-          </a:bodyPr>
-          <a:lstStyle/>
-          <a:p>
-            <a:pPr>
-              <a:lnSpc>
-                <a:spcPct val="100000"/>
-              </a:lnSpc>
-              <a:spcBef>
-                <a:spcPct val="0"/>
-              </a:spcBef>
-              <a:tabLst>
-                <a:tab pos="0" algn="l"/>
-              </a:tabLst>
-            </a:pPr>
-            <a:r>
-              <a:rPr lang="en-US" sz="4400" b="1">
-                <a:latin typeface="+mj-lt"/>
-                <a:ea typeface="+mj-ea"/>
-                <a:cs typeface="+mj-cs"/>
-              </a:rPr>
-              <a:t>05. Kết quả</a:t>
-            </a:r>
-          </a:p>
-        </p:txBody>
-      </p:sp>
-      <p:sp>
-        <p:nvSpPr>
-          <p:cNvPr id="8" name="TextBox 7">
-            <a:extLst>
-              <a:ext uri="{FF2B5EF4-FFF2-40B4-BE49-F238E27FC236}">
-                <a16:creationId xmlns:a16="http://schemas.microsoft.com/office/drawing/2014/main" id="{003A1B96-3A95-3A4F-3843-CE16C738A43B}"/>
+                <a16:creationId xmlns:a16="http://schemas.microsoft.com/office/drawing/2014/main" id="{147E82E3-6CB9-18B4-E11E-42D56935487C}"/>
               </a:ext>
             </a:extLst>
           </p:cNvPr>
@@ -11878,8 +11793,8 @@
         </p:nvSpPr>
         <p:spPr>
           <a:xfrm>
-            <a:off x="385273" y="1061442"/>
-            <a:ext cx="8209010" cy="1622495"/>
+            <a:off x="292609" y="628651"/>
+            <a:ext cx="8209010" cy="1431226"/>
           </a:xfrm>
           <a:prstGeom prst="rect">
             <a:avLst/>
@@ -11909,7 +11824,7 @@
               </a:tabLst>
             </a:pPr>
             <a:r>
-              <a:rPr lang="en-US" sz="1600">
+              <a:rPr lang="en-US" sz="1400">
                 <a:latin typeface="+mj-lt"/>
                 <a:ea typeface="+mj-ea"/>
                 <a:cs typeface="+mj-cs"/>
@@ -11917,7 +11832,7 @@
               <a:t>Hệ thống hoạt động ổn định với các trường hợp cơ bản. </a:t>
             </a:r>
             <a:r>
-              <a:rPr lang="vi-VN" sz="1600">
+              <a:rPr lang="vi-VN" sz="1400">
                 <a:latin typeface="+mj-lt"/>
                 <a:ea typeface="+mj-ea"/>
                 <a:cs typeface="+mj-cs"/>
@@ -11943,7 +11858,7 @@
               </a:tabLst>
             </a:pPr>
             <a:r>
-              <a:rPr lang="vi-VN" sz="1600">
+              <a:rPr lang="vi-VN" sz="1400">
                 <a:latin typeface="+mj-lt"/>
                 <a:ea typeface="+mj-ea"/>
                 <a:cs typeface="+mj-cs"/>
@@ -11951,14 +11866,14 @@
               <a:t>Chưa kiểm soát tốt dữ liệu đầu vào (ví dụ: ký tự đặc biệt trong tìm kiếm) </a:t>
             </a:r>
             <a:r>
-              <a:rPr lang="en-US" sz="1600">
+              <a:rPr lang="en-US" sz="1400">
                 <a:latin typeface="+mj-lt"/>
                 <a:ea typeface="+mj-ea"/>
                 <a:cs typeface="+mj-cs"/>
               </a:rPr>
               <a:t>	</a:t>
             </a:r>
-            <a:endParaRPr lang="vi-VN" sz="1600">
+            <a:endParaRPr lang="vi-VN" sz="1400">
               <a:latin typeface="+mj-lt"/>
               <a:ea typeface="+mj-ea"/>
               <a:cs typeface="+mj-cs"/>
@@ -11982,7 +11897,7 @@
               </a:tabLst>
             </a:pPr>
             <a:r>
-              <a:rPr lang="vi-VN" sz="1600">
+              <a:rPr lang="vi-VN" sz="1400">
                 <a:latin typeface="+mj-lt"/>
                 <a:ea typeface="+mj-ea"/>
                 <a:cs typeface="+mj-cs"/>
@@ -11993,11 +11908,90 @@
         </p:txBody>
       </p:sp>
     </p:spTree>
-    <p:extLst>
-      <p:ext uri="{BB962C8B-B14F-4D97-AF65-F5344CB8AC3E}">
-        <p14:creationId xmlns:p14="http://schemas.microsoft.com/office/powerpoint/2010/main" val="2851060247"/>
-      </p:ext>
-    </p:extLst>
+  </p:cSld>
+  <p:clrMapOvr>
+    <a:masterClrMapping/>
+  </p:clrMapOvr>
+</p:sld>
+</file>
+
+<file path=ppt/slides/slide9.xml><?xml version="1.0" encoding="utf-8"?>
+<p:sld xmlns:a="http://schemas.openxmlformats.org/drawingml/2006/main" xmlns:r="http://schemas.openxmlformats.org/officeDocument/2006/relationships" xmlns:p="http://schemas.openxmlformats.org/presentationml/2006/main">
+  <p:cSld>
+    <p:spTree>
+      <p:nvGrpSpPr>
+        <p:cNvPr id="1" name=""/>
+        <p:cNvGrpSpPr/>
+        <p:nvPr/>
+      </p:nvGrpSpPr>
+      <p:grpSpPr>
+        <a:xfrm>
+          <a:off x="0" y="0"/>
+          <a:ext cx="0" cy="0"/>
+          <a:chOff x="0" y="0"/>
+          <a:chExt cx="0" cy="0"/>
+        </a:xfrm>
+      </p:grpSpPr>
+      <p:sp>
+        <p:nvSpPr>
+          <p:cNvPr id="186" name="PlaceHolder 1"/>
+          <p:cNvSpPr>
+            <a:spLocks noGrp="1"/>
+          </p:cNvSpPr>
+          <p:nvPr>
+            <p:ph type="title"/>
+          </p:nvPr>
+        </p:nvSpPr>
+        <p:spPr>
+          <a:xfrm>
+            <a:off x="2500379" y="1596596"/>
+            <a:ext cx="4993051" cy="1199880"/>
+          </a:xfrm>
+          <a:prstGeom prst="rect">
+            <a:avLst/>
+          </a:prstGeom>
+          <a:noFill/>
+          <a:ln w="0">
+            <a:noFill/>
+          </a:ln>
+        </p:spPr>
+        <p:txBody>
+          <a:bodyPr lIns="91440" tIns="91440" rIns="91440" bIns="91440" anchor="b">
+            <a:noAutofit/>
+          </a:bodyPr>
+          <a:lstStyle/>
+          <a:p>
+            <a:pPr indent="0" algn="ctr">
+              <a:lnSpc>
+                <a:spcPct val="100000"/>
+              </a:lnSpc>
+              <a:buNone/>
+              <a:tabLst>
+                <a:tab pos="0" algn="l"/>
+              </a:tabLst>
+            </a:pPr>
+            <a:r>
+              <a:rPr lang="en-US" b="1" u="none" strike="noStrike">
+                <a:solidFill>
+                  <a:schemeClr val="dk1"/>
+                </a:solidFill>
+                <a:effectLst/>
+                <a:uFillTx/>
+                <a:ea typeface="Golos Text"/>
+              </a:rPr>
+              <a:t>Cảm ơn thầy đã lắng nghe!</a:t>
+            </a:r>
+            <a:endParaRPr lang="fr-FR" b="1" u="none" strike="noStrike">
+              <a:solidFill>
+                <a:schemeClr val="dk1"/>
+              </a:solidFill>
+              <a:effectLst/>
+              <a:uFillTx/>
+            </a:endParaRPr>
+          </a:p>
+        </p:txBody>
+      </p:sp>
+    </p:spTree>
   </p:cSld>
   <p:clrMapOvr>
     <a:masterClrMapping/>
